--- a/dist/초6/사회·역사/세계와공존/초6_사회·역사_세계와공존_01_세계여러나라.pptx
+++ b/dist/초6/사회·역사/세계와공존/초6_사회·역사_세계와공존_01_세계여러나라.pptx
@@ -121,13 +121,13 @@
   <p:extLst>
     <p:ext uri="{521415D9-36F7-43E2-AB2F-B90AF26B5E84}">
       <p14:sectionLst xmlns:p14="http://schemas.microsoft.com/office/powerpoint/2010/main">
-        <p14:section name="도입" id="{271c3a83-b2ce-bdd5-a8f1-3613d2e33fcd}">
+        <p14:section name="도입" id="{497cac96-9c07-c9d6-4fb3-f4adf95b73ef}">
           <p14:sldIdLst>
             <p14:sldId id="256"/>
             <p14:sldId id="257"/>
           </p14:sldIdLst>
         </p14:section>
-        <p14:section name="개념" id="{65083407-c48a-e968-e712-55216e05fd9c}">
+        <p14:section name="개념" id="{b8160e25-3041-06bc-c270-730bd84f89c1}">
           <p14:sldIdLst>
             <p14:sldId id="258"/>
             <p14:sldId id="259"/>
@@ -135,7 +135,7 @@
             <p14:sldId id="263"/>
           </p14:sldIdLst>
         </p14:section>
-        <p14:section name="연습" id="{2e1d13fa-74e0-a517-db30-851bce320433}">
+        <p14:section name="연습" id="{44814a5f-93a8-e815-b725-1f62fde3218e}">
           <p14:sldIdLst>
             <p14:sldId id="260"/>
             <p14:sldId id="262"/>
@@ -143,31 +143,31 @@
             <p14:sldId id="265"/>
           </p14:sldIdLst>
         </p14:section>
-        <p14:section name="개념" id="{f18d9913-822a-bee6-f20e-28a6f084288b}">
+        <p14:section name="개념" id="{aa4cb085-1eb4-e6c0-63a0-f6cf2fc54ed8}">
           <p14:sldIdLst/>
         </p14:section>
-        <p14:section name="연습" id="{4434376e-dfc4-95be-15d7-76f92250db96}">
+        <p14:section name="연습" id="{aaa4ccb2-0473-785b-da19-4de4e8afeeb1}">
           <p14:sldIdLst/>
         </p14:section>
-        <p14:section name="개념" id="{ed7b5c70-2f55-8467-4439-3ff19f6c9657}">
+        <p14:section name="개념" id="{eafd7d74-eb8c-3aa5-bccf-38efca020556}">
           <p14:sldIdLst/>
         </p14:section>
-        <p14:section name="연습" id="{81d14e68-2202-1fc0-6560-5eeea38dfedf}">
+        <p14:section name="연습" id="{2e5d19c3-3171-381a-994b-6edbf44081aa}">
           <p14:sldIdLst/>
         </p14:section>
-        <p14:section name="확인" id="{9d34d2ab-fbbd-9054-e421-85ee63434bb1}">
+        <p14:section name="확인" id="{6bb970be-16c5-b9e1-a74a-886ad1c4687d}">
           <p14:sldIdLst>
             <p14:sldId id="266"/>
             <p14:sldId id="267"/>
             <p14:sldId id="268"/>
           </p14:sldIdLst>
         </p14:section>
-        <p14:section name="정리" id="{e2c9dd7b-1c79-1cc6-1c42-d613c5b09c19}">
+        <p14:section name="정리" id="{9e8317d2-9856-8867-6ed0-34774adff82e}">
           <p14:sldIdLst>
             <p14:sldId id="269"/>
           </p14:sldIdLst>
         </p14:section>
-        <p14:section name="보충" id="{0bec2fa5-bb21-9ffc-1bfc-68f0c2496206}">
+        <p14:section name="보충" id="{3ca2e5a1-09eb-3b2a-abc9-d57bfafd31d1}">
           <p14:sldIdLst>
             <p14:sldId id="270"/>
           </p14:sldIdLst>
